--- a/classes/parte-5-explotacion-de-sistemas-y-binarios/116-arquitectura-x86-x64-y-lenguaje-ensamblador/clase-116-presentacion.pptx
+++ b/classes/parte-5-explotacion-de-sistemas-y-binarios/116-arquitectura-x86-x64-y-lenguaje-ensamblador/clase-116-presentacion.pptx
@@ -17,6 +17,9 @@
     <p:sldId id="265" r:id="rId16"/>
     <p:sldId id="266" r:id="rId17"/>
     <p:sldId id="267" r:id="rId18"/>
+    <p:sldId id="268" r:id="rId19"/>
+    <p:sldId id="269" r:id="rId20"/>
+    <p:sldId id="270" r:id="rId21"/>
   </p:sldIdLst>
   <p:sldSz cx="9144000" cy="6858000" type="screen4x3"/>
   <p:notesSz cx="6858000" cy="9144000"/>
@@ -3198,7 +3201,7 @@
                   <a:srgbClr val="0B3D2E"/>
                 </a:solidFill>
               </a:rPr>
-              <a:t>⚠️ Errores comunes</a:t>
+              <a:t>✍️ Ejercicios</a:t>
             </a:r>
           </a:p>
         </p:txBody>
@@ -3236,67 +3239,82 @@
                   <a:srgbClr val="22282E"/>
                 </a:solidFill>
               </a:rPr>
-              <a:t>•  objdump muestra AT&amp;T y no lo entiendes — Añade -M intel, o set disassembly-flavor intel en GDB</a:t>
-            </a:r>
-          </a:p>
-          <a:p>
-            <a:pPr>
-              <a:spcAft>
-                <a:spcPts val="600"/>
-              </a:spcAft>
-            </a:pPr>
-            <a:r>
-              <a:rPr sz="1500">
-                <a:solidFill>
-                  <a:srgbClr val="22282E"/>
-                </a:solidFill>
-              </a:rPr>
-              <a:t>•  ld: cannot find entry symbol start — Falta global start; NASM no exporta el símbolo por defecto</a:t>
-            </a:r>
-          </a:p>
-          <a:p>
-            <a:pPr>
-              <a:spcAft>
-                <a:spcPts val="600"/>
-              </a:spcAft>
-            </a:pPr>
-            <a:r>
-              <a:rPr sz="1500">
-                <a:solidFill>
-                  <a:srgbClr val="22282E"/>
-                </a:solidFill>
-              </a:rPr>
-              <a:t>•  Segfault al salir del NASM — Usaste ret sin stack válido; termina con la syscall exit</a:t>
-            </a:r>
-          </a:p>
-          <a:p>
-            <a:pPr>
-              <a:spcAft>
-                <a:spcPts val="600"/>
-              </a:spcAft>
-            </a:pPr>
-            <a:r>
-              <a:rPr sz="1500">
-                <a:solidFill>
-                  <a:srgbClr val="22282E"/>
-                </a:solidFill>
-              </a:rPr>
-              <a:t>•  Registros de 32 bits "no cambian" los altos — Escribir EAX sí pone a cero el alto de RAX; revisa qué mitad usas</a:t>
-            </a:r>
-          </a:p>
-          <a:p>
-            <a:pPr>
-              <a:spcAft>
-                <a:spcPts val="600"/>
-              </a:spcAft>
-            </a:pPr>
-            <a:r>
-              <a:rPr sz="1500">
-                <a:solidFill>
-                  <a:srgbClr val="22282E"/>
-                </a:solidFill>
-              </a:rPr>
-              <a:t>•  El ASM de -O2 no coincide con tu C — El optimizador reordena/elimina; compila con -O0 para aprender</a:t>
+              <a:t>•  Convierte a sintaxis AT&amp;T: mov eax, 5, add rbx, rax, lea rax, [rbp-0x4].</a:t>
+            </a:r>
+          </a:p>
+          <a:p>
+            <a:pPr>
+              <a:spcAft>
+                <a:spcPts val="600"/>
+              </a:spcAft>
+            </a:pPr>
+            <a:r>
+              <a:rPr sz="1500">
+                <a:solidFill>
+                  <a:srgbClr val="22282E"/>
+                </a:solidFill>
+              </a:rPr>
+              <a:t>•  Escribe en little-endian los bytes de la dirección 0x00401136.</a:t>
+            </a:r>
+          </a:p>
+          <a:p>
+            <a:pPr>
+              <a:spcAft>
+                <a:spcPts val="600"/>
+              </a:spcAft>
+            </a:pPr>
+            <a:r>
+              <a:rPr sz="1500">
+                <a:solidFill>
+                  <a:srgbClr val="22282E"/>
+                </a:solidFill>
+              </a:rPr>
+              <a:t>•  Modifica hola.asm para que devuelva la suma de dos inmediatos usando add.</a:t>
+            </a:r>
+          </a:p>
+          <a:p>
+            <a:pPr>
+              <a:spcAft>
+                <a:spcPts val="600"/>
+              </a:spcAft>
+            </a:pPr>
+            <a:r>
+              <a:rPr sz="1500">
+                <a:solidFill>
+                  <a:srgbClr val="22282E"/>
+                </a:solidFill>
+              </a:rPr>
+              <a:t>•  Compila suma.c con -O2 y explica por qué el desensamblado es más corto.</a:t>
+            </a:r>
+          </a:p>
+          <a:p>
+            <a:pPr>
+              <a:spcAft>
+                <a:spcPts val="600"/>
+              </a:spcAft>
+            </a:pPr>
+            <a:r>
+              <a:rPr sz="1500">
+                <a:solidFill>
+                  <a:srgbClr val="22282E"/>
+                </a:solidFill>
+              </a:rPr>
+              <a:t>•  Identifica en un objdump cualquiera tres instrucciones de salto y di qué bandera consultan.</a:t>
+            </a:r>
+          </a:p>
+          <a:p>
+            <a:pPr>
+              <a:spcAft>
+                <a:spcPts val="600"/>
+              </a:spcAft>
+            </a:pPr>
+            <a:r>
+              <a:rPr sz="1500">
+                <a:solidFill>
+                  <a:srgbClr val="22282E"/>
+                </a:solidFill>
+              </a:rPr>
+              <a:t>•  Escribe una función C con un if y localiza el cmp + jne correspondiente en el ASM.</a:t>
             </a:r>
           </a:p>
         </p:txBody>
@@ -3347,7 +3365,7 @@
                   <a:srgbClr val="0B3D2E"/>
                 </a:solidFill>
               </a:rPr>
-              <a:t>❓ Preguntas frecuentes</a:t>
+              <a:t>📝 Reto verificable</a:t>
             </a:r>
           </a:p>
         </p:txBody>
@@ -3385,82 +3403,52 @@
                   <a:srgbClr val="22282E"/>
                 </a:solidFill>
               </a:rPr>
-              <a:t>•  ❓ ¿Necesito aprender x86 de 32 bits si todo es de 64? Sí: muchos retos de CTF y binarios legacy</a:t>
-            </a:r>
-          </a:p>
-          <a:p>
-            <a:pPr>
-              <a:spcAft>
-                <a:spcPts val="600"/>
-              </a:spcAft>
-            </a:pPr>
-            <a:r>
-              <a:rPr sz="1500">
-                <a:solidFill>
-                  <a:srgbClr val="22282E"/>
-                </a:solidFill>
-              </a:rPr>
-              <a:t>•  son de 32 bits, y las convenciones (paso de argumentos por stack) son distintas y didácticas.</a:t>
-            </a:r>
-          </a:p>
-          <a:p>
-            <a:pPr>
-              <a:spcAft>
-                <a:spcPts val="600"/>
-              </a:spcAft>
-            </a:pPr>
-            <a:r>
-              <a:rPr sz="1500">
-                <a:solidFill>
-                  <a:srgbClr val="22282E"/>
-                </a:solidFill>
-              </a:rPr>
-              <a:t>•  ❓ ¿Intel o AT&amp;T? Aprende a leer ambas. Intel suele ser más clara para principiantes; AT&amp;T es el</a:t>
-            </a:r>
-          </a:p>
-          <a:p>
-            <a:pPr>
-              <a:spcAft>
-                <a:spcPts val="600"/>
-              </a:spcAft>
-            </a:pPr>
-            <a:r>
-              <a:rPr sz="1500">
-                <a:solidFill>
-                  <a:srgbClr val="22282E"/>
-                </a:solidFill>
-              </a:rPr>
-              <a:t>•  default de muchas herramientas GNU.</a:t>
-            </a:r>
-          </a:p>
-          <a:p>
-            <a:pPr>
-              <a:spcAft>
-                <a:spcPts val="600"/>
-              </a:spcAft>
-            </a:pPr>
-            <a:r>
-              <a:rPr sz="1500">
-                <a:solidFill>
-                  <a:srgbClr val="22282E"/>
-                </a:solidFill>
-              </a:rPr>
-              <a:t>•  ❓ ¿Tengo que memorizar todas las instrucciones? No. Domina un núcleo de ~20 instrucciones y</a:t>
-            </a:r>
-          </a:p>
-          <a:p>
-            <a:pPr>
-              <a:spcAft>
-                <a:spcPts val="600"/>
-              </a:spcAft>
-            </a:pPr>
-            <a:r>
-              <a:rPr sz="1500">
-                <a:solidFill>
-                  <a:srgbClr val="22282E"/>
-                </a:solidFill>
-              </a:rPr>
-              <a:t>•  consulta el Intel SDM para el resto.</a:t>
+              <a:t>•  Escribe en NASM un programa que calcule (7  6) - 5 usando solo registros e instrucciones</a:t>
+            </a:r>
+          </a:p>
+          <a:p>
+            <a:pPr>
+              <a:spcAft>
+                <a:spcPts val="600"/>
+              </a:spcAft>
+            </a:pPr>
+            <a:r>
+              <a:rPr sz="1500">
+                <a:solidFill>
+                  <a:srgbClr val="22282E"/>
+                </a:solidFill>
+              </a:rPr>
+              <a:t>•  aritméticas y devuelva el resultado como código de salida.</a:t>
+            </a:r>
+          </a:p>
+          <a:p>
+            <a:pPr>
+              <a:spcAft>
+                <a:spcPts val="600"/>
+              </a:spcAft>
+            </a:pPr>
+            <a:r>
+              <a:rPr sz="1500">
+                <a:solidFill>
+                  <a:srgbClr val="22282E"/>
+                </a:solidFill>
+              </a:rPr>
+              <a:t>•  Criterio de aceptación: ./programa; echo $? imprime 37, y objdump -d muestra al menos</a:t>
+            </a:r>
+          </a:p>
+          <a:p>
+            <a:pPr>
+              <a:spcAft>
+                <a:spcPts val="600"/>
+              </a:spcAft>
+            </a:pPr>
+            <a:r>
+              <a:rPr sz="1500">
+                <a:solidFill>
+                  <a:srgbClr val="22282E"/>
+                </a:solidFill>
+              </a:rPr>
+              <a:t>•  una instrucción imul/mul y una sub.</a:t>
             </a:r>
           </a:p>
         </p:txBody>
@@ -3511,7 +3499,7 @@
                   <a:srgbClr val="0B3D2E"/>
                 </a:solidFill>
               </a:rPr>
-              <a:t>🔗 Referencias</a:t>
+              <a:t>⚠️ Errores comunes</a:t>
             </a:r>
           </a:p>
         </p:txBody>
@@ -3549,6 +3537,319 @@
                   <a:srgbClr val="22282E"/>
                 </a:solidFill>
               </a:rPr>
+              <a:t>•  objdump muestra AT&amp;T y no lo entiendes — Añade -M intel, o set disassembly-flavor intel en GDB</a:t>
+            </a:r>
+          </a:p>
+          <a:p>
+            <a:pPr>
+              <a:spcAft>
+                <a:spcPts val="600"/>
+              </a:spcAft>
+            </a:pPr>
+            <a:r>
+              <a:rPr sz="1500">
+                <a:solidFill>
+                  <a:srgbClr val="22282E"/>
+                </a:solidFill>
+              </a:rPr>
+              <a:t>•  ld: cannot find entry symbol start — Falta global start; NASM no exporta el símbolo por defecto</a:t>
+            </a:r>
+          </a:p>
+          <a:p>
+            <a:pPr>
+              <a:spcAft>
+                <a:spcPts val="600"/>
+              </a:spcAft>
+            </a:pPr>
+            <a:r>
+              <a:rPr sz="1500">
+                <a:solidFill>
+                  <a:srgbClr val="22282E"/>
+                </a:solidFill>
+              </a:rPr>
+              <a:t>•  Segfault al salir del NASM — Usaste ret sin stack válido; termina con la syscall exit</a:t>
+            </a:r>
+          </a:p>
+          <a:p>
+            <a:pPr>
+              <a:spcAft>
+                <a:spcPts val="600"/>
+              </a:spcAft>
+            </a:pPr>
+            <a:r>
+              <a:rPr sz="1500">
+                <a:solidFill>
+                  <a:srgbClr val="22282E"/>
+                </a:solidFill>
+              </a:rPr>
+              <a:t>•  Registros de 32 bits "no cambian" los altos — Escribir EAX sí pone a cero el alto de RAX; revisa qué mitad usas</a:t>
+            </a:r>
+          </a:p>
+          <a:p>
+            <a:pPr>
+              <a:spcAft>
+                <a:spcPts val="600"/>
+              </a:spcAft>
+            </a:pPr>
+            <a:r>
+              <a:rPr sz="1500">
+                <a:solidFill>
+                  <a:srgbClr val="22282E"/>
+                </a:solidFill>
+              </a:rPr>
+              <a:t>•  El ASM de -O2 no coincide con tu C — El optimizador reordena/elimina; compila con -O0 para aprender</a:t>
+            </a:r>
+          </a:p>
+        </p:txBody>
+      </p:sp>
+    </p:spTree>
+  </p:cSld>
+  <p:clrMapOvr>
+    <a:masterClrMapping/>
+  </p:clrMapOvr>
+</p:sld>
+</file>
+
+<file path=ppt/slides/slide13.xml><?xml version="1.0" encoding="utf-8"?>
+<p:sld xmlns:a="http://schemas.openxmlformats.org/drawingml/2006/main" xmlns:p="http://schemas.openxmlformats.org/presentationml/2006/main" xmlns:r="http://schemas.openxmlformats.org/officeDocument/2006/relationships">
+  <p:cSld>
+    <p:spTree>
+      <p:nvGrpSpPr>
+        <p:cNvPr id="1" name=""/>
+        <p:cNvGrpSpPr/>
+        <p:nvPr/>
+      </p:nvGrpSpPr>
+      <p:grpSpPr/>
+      <p:sp>
+        <p:nvSpPr>
+          <p:cNvPr id="2" name="TextBox 1"/>
+          <p:cNvSpPr txBox="1"/>
+          <p:nvPr/>
+        </p:nvSpPr>
+        <p:spPr>
+          <a:xfrm>
+            <a:off x="457200" y="320040"/>
+            <a:ext cx="8229600" cy="822960"/>
+          </a:xfrm>
+          <a:prstGeom prst="rect">
+            <a:avLst/>
+          </a:prstGeom>
+          <a:noFill/>
+        </p:spPr>
+        <p:txBody>
+          <a:bodyPr wrap="square">
+            <a:spAutoFit/>
+          </a:bodyPr>
+          <a:lstStyle/>
+          <a:p>
+            <a:r>
+              <a:rPr sz="2600" b="1">
+                <a:solidFill>
+                  <a:srgbClr val="0B3D2E"/>
+                </a:solidFill>
+              </a:rPr>
+              <a:t>❓ Preguntas frecuentes</a:t>
+            </a:r>
+          </a:p>
+        </p:txBody>
+      </p:sp>
+      <p:sp>
+        <p:nvSpPr>
+          <p:cNvPr id="3" name="TextBox 2"/>
+          <p:cNvSpPr txBox="1"/>
+          <p:nvPr/>
+        </p:nvSpPr>
+        <p:spPr>
+          <a:xfrm>
+            <a:off x="457200" y="1280160"/>
+            <a:ext cx="8229600" cy="4937760"/>
+          </a:xfrm>
+          <a:prstGeom prst="rect">
+            <a:avLst/>
+          </a:prstGeom>
+          <a:noFill/>
+        </p:spPr>
+        <p:txBody>
+          <a:bodyPr wrap="square">
+            <a:spAutoFit/>
+          </a:bodyPr>
+          <a:lstStyle/>
+          <a:p>
+            <a:pPr>
+              <a:spcAft>
+                <a:spcPts val="600"/>
+              </a:spcAft>
+            </a:pPr>
+            <a:r>
+              <a:rPr sz="1500">
+                <a:solidFill>
+                  <a:srgbClr val="22282E"/>
+                </a:solidFill>
+              </a:rPr>
+              <a:t>•  ❓ ¿Necesito aprender x86 de 32 bits si todo es de 64? Sí: muchos retos de CTF y binarios legacy</a:t>
+            </a:r>
+          </a:p>
+          <a:p>
+            <a:pPr>
+              <a:spcAft>
+                <a:spcPts val="600"/>
+              </a:spcAft>
+            </a:pPr>
+            <a:r>
+              <a:rPr sz="1500">
+                <a:solidFill>
+                  <a:srgbClr val="22282E"/>
+                </a:solidFill>
+              </a:rPr>
+              <a:t>•  son de 32 bits, y las convenciones (paso de argumentos por stack) son distintas y didácticas.</a:t>
+            </a:r>
+          </a:p>
+          <a:p>
+            <a:pPr>
+              <a:spcAft>
+                <a:spcPts val="600"/>
+              </a:spcAft>
+            </a:pPr>
+            <a:r>
+              <a:rPr sz="1500">
+                <a:solidFill>
+                  <a:srgbClr val="22282E"/>
+                </a:solidFill>
+              </a:rPr>
+              <a:t>•  ❓ ¿Intel o AT&amp;T? Aprende a leer ambas. Intel suele ser más clara para principiantes; AT&amp;T es el</a:t>
+            </a:r>
+          </a:p>
+          <a:p>
+            <a:pPr>
+              <a:spcAft>
+                <a:spcPts val="600"/>
+              </a:spcAft>
+            </a:pPr>
+            <a:r>
+              <a:rPr sz="1500">
+                <a:solidFill>
+                  <a:srgbClr val="22282E"/>
+                </a:solidFill>
+              </a:rPr>
+              <a:t>•  default de muchas herramientas GNU.</a:t>
+            </a:r>
+          </a:p>
+          <a:p>
+            <a:pPr>
+              <a:spcAft>
+                <a:spcPts val="600"/>
+              </a:spcAft>
+            </a:pPr>
+            <a:r>
+              <a:rPr sz="1500">
+                <a:solidFill>
+                  <a:srgbClr val="22282E"/>
+                </a:solidFill>
+              </a:rPr>
+              <a:t>•  ❓ ¿Tengo que memorizar todas las instrucciones? No. Domina un núcleo de ~20 instrucciones y</a:t>
+            </a:r>
+          </a:p>
+          <a:p>
+            <a:pPr>
+              <a:spcAft>
+                <a:spcPts val="600"/>
+              </a:spcAft>
+            </a:pPr>
+            <a:r>
+              <a:rPr sz="1500">
+                <a:solidFill>
+                  <a:srgbClr val="22282E"/>
+                </a:solidFill>
+              </a:rPr>
+              <a:t>•  consulta el Intel SDM para el resto.</a:t>
+            </a:r>
+          </a:p>
+        </p:txBody>
+      </p:sp>
+    </p:spTree>
+  </p:cSld>
+  <p:clrMapOvr>
+    <a:masterClrMapping/>
+  </p:clrMapOvr>
+</p:sld>
+</file>
+
+<file path=ppt/slides/slide14.xml><?xml version="1.0" encoding="utf-8"?>
+<p:sld xmlns:a="http://schemas.openxmlformats.org/drawingml/2006/main" xmlns:p="http://schemas.openxmlformats.org/presentationml/2006/main" xmlns:r="http://schemas.openxmlformats.org/officeDocument/2006/relationships">
+  <p:cSld>
+    <p:spTree>
+      <p:nvGrpSpPr>
+        <p:cNvPr id="1" name=""/>
+        <p:cNvGrpSpPr/>
+        <p:nvPr/>
+      </p:nvGrpSpPr>
+      <p:grpSpPr/>
+      <p:sp>
+        <p:nvSpPr>
+          <p:cNvPr id="2" name="TextBox 1"/>
+          <p:cNvSpPr txBox="1"/>
+          <p:nvPr/>
+        </p:nvSpPr>
+        <p:spPr>
+          <a:xfrm>
+            <a:off x="457200" y="320040"/>
+            <a:ext cx="8229600" cy="822960"/>
+          </a:xfrm>
+          <a:prstGeom prst="rect">
+            <a:avLst/>
+          </a:prstGeom>
+          <a:noFill/>
+        </p:spPr>
+        <p:txBody>
+          <a:bodyPr wrap="square">
+            <a:spAutoFit/>
+          </a:bodyPr>
+          <a:lstStyle/>
+          <a:p>
+            <a:r>
+              <a:rPr sz="2600" b="1">
+                <a:solidFill>
+                  <a:srgbClr val="0B3D2E"/>
+                </a:solidFill>
+              </a:rPr>
+              <a:t>🔗 Referencias</a:t>
+            </a:r>
+          </a:p>
+        </p:txBody>
+      </p:sp>
+      <p:sp>
+        <p:nvSpPr>
+          <p:cNvPr id="3" name="TextBox 2"/>
+          <p:cNvSpPr txBox="1"/>
+          <p:nvPr/>
+        </p:nvSpPr>
+        <p:spPr>
+          <a:xfrm>
+            <a:off x="457200" y="1280160"/>
+            <a:ext cx="8229600" cy="4937760"/>
+          </a:xfrm>
+          <a:prstGeom prst="rect">
+            <a:avLst/>
+          </a:prstGeom>
+          <a:noFill/>
+        </p:spPr>
+        <p:txBody>
+          <a:bodyPr wrap="square">
+            <a:spAutoFit/>
+          </a:bodyPr>
+          <a:lstStyle/>
+          <a:p>
+            <a:pPr>
+              <a:spcAft>
+                <a:spcPts val="600"/>
+              </a:spcAft>
+            </a:pPr>
+            <a:r>
+              <a:rPr sz="1500">
+                <a:solidFill>
+                  <a:srgbClr val="22282E"/>
+                </a:solidFill>
+              </a:rPr>
               <a:t>•  Erickson, J. Hacking: The Art of Exploitation, 2e, cap. 0x2. No Starch Press.</a:t>
             </a:r>
           </a:p>
@@ -3599,6 +3900,81 @@
           </a:p>
         </p:txBody>
       </p:sp>
+    </p:spTree>
+  </p:cSld>
+  <p:clrMapOvr>
+    <a:masterClrMapping/>
+  </p:clrMapOvr>
+</p:sld>
+</file>
+
+<file path=ppt/slides/slide15.xml><?xml version="1.0" encoding="utf-8"?>
+<p:sld xmlns:a="http://schemas.openxmlformats.org/drawingml/2006/main" xmlns:p="http://schemas.openxmlformats.org/presentationml/2006/main" xmlns:r="http://schemas.openxmlformats.org/officeDocument/2006/relationships">
+  <p:cSld>
+    <p:spTree>
+      <p:nvGrpSpPr>
+        <p:cNvPr id="1" name=""/>
+        <p:cNvGrpSpPr/>
+        <p:nvPr/>
+      </p:nvGrpSpPr>
+      <p:grpSpPr/>
+      <p:sp>
+        <p:nvSpPr>
+          <p:cNvPr id="2" name="TextBox 1"/>
+          <p:cNvSpPr txBox="1"/>
+          <p:nvPr/>
+        </p:nvSpPr>
+        <p:spPr>
+          <a:xfrm>
+            <a:off x="457200" y="274320"/>
+            <a:ext cx="8229600" cy="640080"/>
+          </a:xfrm>
+          <a:prstGeom prst="rect">
+            <a:avLst/>
+          </a:prstGeom>
+          <a:noFill/>
+        </p:spPr>
+        <p:txBody>
+          <a:bodyPr wrap="square">
+            <a:spAutoFit/>
+          </a:bodyPr>
+          <a:lstStyle/>
+          <a:p>
+            <a:r>
+              <a:rPr sz="2200" b="1">
+                <a:solidFill>
+                  <a:srgbClr val="0B3D2E"/>
+                </a:solidFill>
+              </a:rPr>
+              <a:t>Diagrama de la clase</a:t>
+            </a:r>
+          </a:p>
+        </p:txBody>
+      </p:sp>
+      <p:pic>
+        <p:nvPicPr>
+          <p:cNvPr id="3" name="Picture 2" descr="c5d03865606eb06b.png"/>
+          <p:cNvPicPr>
+            <a:picLocks noChangeAspect="1"/>
+          </p:cNvPicPr>
+          <p:nvPr/>
+        </p:nvPicPr>
+        <p:blipFill>
+          <a:blip r:embed="rId2"/>
+          <a:stretch>
+            <a:fillRect/>
+          </a:stretch>
+        </p:blipFill>
+        <p:spPr>
+          <a:xfrm>
+            <a:off x="457200" y="3314700"/>
+            <a:ext cx="8229600" cy="868680"/>
+          </a:xfrm>
+          <a:prstGeom prst="rect">
+            <a:avLst/>
+          </a:prstGeom>
+        </p:spPr>
+      </p:pic>
     </p:spTree>
   </p:cSld>
   <p:clrMapOvr>
@@ -4137,7 +4513,7 @@
                   <a:srgbClr val="0B3D2E"/>
                 </a:solidFill>
               </a:rPr>
-              <a:t>📖 Definiciones y características</a:t>
+              <a:t>🧠 Explicación en profundidad</a:t>
             </a:r>
           </a:p>
         </p:txBody>
@@ -4175,97 +4551,97 @@
                   <a:srgbClr val="22282E"/>
                 </a:solidFill>
               </a:rPr>
-              <a:t>•  Registro de propósito general (GPR): almacenamiento rapidísimo dentro de la CPU. En x64 hay</a:t>
-            </a:r>
-          </a:p>
-          <a:p>
-            <a:pPr>
-              <a:spcAft>
-                <a:spcPts val="600"/>
-              </a:spcAft>
-            </a:pPr>
-            <a:r>
-              <a:rPr sz="1500">
-                <a:solidFill>
-                  <a:srgbClr val="22282E"/>
-                </a:solidFill>
-              </a:rPr>
-              <a:t>•  16 de 64 bits (RAX–R15); sus mitades de 32 bits son EAX, etc. Característica clave: operar</a:t>
-            </a:r>
-          </a:p>
-          <a:p>
-            <a:pPr>
-              <a:spcAft>
-                <a:spcPts val="600"/>
-              </a:spcAft>
-            </a:pPr>
-            <a:r>
-              <a:rPr sz="1500">
-                <a:solidFill>
-                  <a:srgbClr val="22282E"/>
-                </a:solidFill>
-              </a:rPr>
-              <a:t>•  sobre EAX pone a cero los 32 bits altos de RAX.</a:t>
-            </a:r>
-          </a:p>
-          <a:p>
-            <a:pPr>
-              <a:spcAft>
-                <a:spcPts val="600"/>
-              </a:spcAft>
-            </a:pPr>
-            <a:r>
-              <a:rPr sz="1500">
-                <a:solidFill>
-                  <a:srgbClr val="22282E"/>
-                </a:solidFill>
-              </a:rPr>
-              <a:t>•  RIP / EIP (instruction pointer): apunta a la siguiente instrucción a ejecutar. Clave: no se</a:t>
-            </a:r>
-          </a:p>
-          <a:p>
-            <a:pPr>
-              <a:spcAft>
-                <a:spcPts val="600"/>
-              </a:spcAft>
-            </a:pPr>
-            <a:r>
-              <a:rPr sz="1500">
-                <a:solidFill>
-                  <a:srgbClr val="22282E"/>
-                </a:solidFill>
-              </a:rPr>
-              <a:t>•  escribe directamente con mov; se altera con call, ret, jmp — de ahí su valor para el atacante.</a:t>
-            </a:r>
-          </a:p>
-          <a:p>
-            <a:pPr>
-              <a:spcAft>
-                <a:spcPts val="600"/>
-              </a:spcAft>
-            </a:pPr>
-            <a:r>
-              <a:rPr sz="1500">
-                <a:solidFill>
-                  <a:srgbClr val="22282E"/>
-                </a:solidFill>
-              </a:rPr>
-              <a:t>•  RFLAGS: registro de banderas (ZF, SF, CF, OF…) que refleja el resultado de operaciones y guía</a:t>
-            </a:r>
-          </a:p>
-          <a:p>
-            <a:pPr>
-              <a:spcAft>
-                <a:spcPts val="600"/>
-              </a:spcAft>
-            </a:pPr>
-            <a:r>
-              <a:rPr sz="1500">
-                <a:solidFill>
-                  <a:srgbClr val="22282E"/>
-                </a:solidFill>
-              </a:rPr>
-              <a:t>•  los saltos condicionales. Clave: cmp no guarda resultado, solo actualiza banderas.</a:t>
+              <a:t>•  La explotación de binarios opera un nivel por debajo del código fuente: manipula</a:t>
+            </a:r>
+          </a:p>
+          <a:p>
+            <a:pPr>
+              <a:spcAft>
+                <a:spcPts val="600"/>
+              </a:spcAft>
+            </a:pPr>
+            <a:r>
+              <a:rPr sz="1500">
+                <a:solidFill>
+                  <a:srgbClr val="22282E"/>
+                </a:solidFill>
+              </a:rPr>
+              <a:t>•  directamente los registros, la memoria y el flujo de ejecución de la máquina. Por eso</a:t>
+            </a:r>
+          </a:p>
+          <a:p>
+            <a:pPr>
+              <a:spcAft>
+                <a:spcPts val="600"/>
+              </a:spcAft>
+            </a:pPr>
+            <a:r>
+              <a:rPr sz="1500">
+                <a:solidFill>
+                  <a:srgbClr val="22282E"/>
+                </a:solidFill>
+              </a:rPr>
+              <a:t>•  esta parte empieza donde terminó la Clase 024 —CPU, registros y pila— y lo</a:t>
+            </a:r>
+          </a:p>
+          <a:p>
+            <a:pPr>
+              <a:spcAft>
+                <a:spcPts val="600"/>
+              </a:spcAft>
+            </a:pPr>
+            <a:r>
+              <a:rPr sz="1500">
+                <a:solidFill>
+                  <a:srgbClr val="22282E"/>
+                </a:solidFill>
+              </a:rPr>
+              <a:t>•  profundiza hasta el punto en que se puede leer ensamblador con fluidez. No se trata de</a:t>
+            </a:r>
+          </a:p>
+          <a:p>
+            <a:pPr>
+              <a:spcAft>
+                <a:spcPts val="600"/>
+              </a:spcAft>
+            </a:pPr>
+            <a:r>
+              <a:rPr sz="1500">
+                <a:solidFill>
+                  <a:srgbClr val="22282E"/>
+                </a:solidFill>
+              </a:rPr>
+              <a:t>•  convertirse en programador de ASM, sino de entender qué hace cada instrucción, porque un exploit</a:t>
+            </a:r>
+          </a:p>
+          <a:p>
+            <a:pPr>
+              <a:spcAft>
+                <a:spcPts val="600"/>
+              </a:spcAft>
+            </a:pPr>
+            <a:r>
+              <a:rPr sz="1500">
+                <a:solidFill>
+                  <a:srgbClr val="22282E"/>
+                </a:solidFill>
+              </a:rPr>
+              <a:t>•  consiste, en el fondo, en conseguir que la CPU ejecute instrucciones que el programador no</a:t>
+            </a:r>
+          </a:p>
+          <a:p>
+            <a:pPr>
+              <a:spcAft>
+                <a:spcPts val="600"/>
+              </a:spcAft>
+            </a:pPr>
+            <a:r>
+              <a:rPr sz="1500">
+                <a:solidFill>
+                  <a:srgbClr val="22282E"/>
+                </a:solidFill>
+              </a:rPr>
+              <a:t>•  puso ahí.</a:t>
             </a:r>
           </a:p>
         </p:txBody>
@@ -4316,7 +4692,7 @@
                   <a:srgbClr val="0B3D2E"/>
                 </a:solidFill>
               </a:rPr>
-              <a:t>🧰 Herramientas y preparación</a:t>
+              <a:t>📖 Definiciones y características</a:t>
             </a:r>
           </a:p>
         </p:txBody>
@@ -4354,67 +4730,97 @@
                   <a:srgbClr val="22282E"/>
                 </a:solidFill>
               </a:rPr>
-              <a:t>•  Trabaja en una VM Linux aislada (por ejemplo Ubuntu/Kali x86-64) que usarás durante toda la parte.</a:t>
-            </a:r>
-          </a:p>
-          <a:p>
-            <a:pPr>
-              <a:spcAft>
-                <a:spcPts val="600"/>
-              </a:spcAft>
-            </a:pPr>
-            <a:r>
-              <a:rPr sz="1500">
-                <a:solidFill>
-                  <a:srgbClr val="22282E"/>
-                </a:solidFill>
-              </a:rPr>
-              <a:t>•  sudo apt update</a:t>
-            </a:r>
-          </a:p>
-          <a:p>
-            <a:pPr>
-              <a:spcAft>
-                <a:spcPts val="600"/>
-              </a:spcAft>
-            </a:pPr>
-            <a:r>
-              <a:rPr sz="1500">
-                <a:solidFill>
-                  <a:srgbClr val="22282E"/>
-                </a:solidFill>
-              </a:rPr>
-              <a:t>•  sudo apt install -y build-essential gdb gcc-multilib nasm binutils</a:t>
-            </a:r>
-          </a:p>
-          <a:p>
-            <a:pPr>
-              <a:spcAft>
-                <a:spcPts val="600"/>
-              </a:spcAft>
-            </a:pPr>
-            <a:r>
-              <a:rPr sz="1500">
-                <a:solidFill>
-                  <a:srgbClr val="22282E"/>
-                </a:solidFill>
-              </a:rPr>
-              <a:t>•  gcc --version &amp;&amp; objdump --version &amp;&amp; nasm --version</a:t>
-            </a:r>
-          </a:p>
-          <a:p>
-            <a:pPr>
-              <a:spcAft>
-                <a:spcPts val="600"/>
-              </a:spcAft>
-            </a:pPr>
-            <a:r>
-              <a:rPr sz="1500">
-                <a:solidFill>
-                  <a:srgbClr val="22282E"/>
-                </a:solidFill>
-              </a:rPr>
-              <a:t>•  Para ver desensamblado con sintaxis Intel de forma cómoda añade a ~/.gdbinit: set disassembly-flavor intel.</a:t>
+              <a:t>•  Registro de propósito general (GPR): almacenamiento rapidísimo dentro de la CPU. En x64 hay</a:t>
+            </a:r>
+          </a:p>
+          <a:p>
+            <a:pPr>
+              <a:spcAft>
+                <a:spcPts val="600"/>
+              </a:spcAft>
+            </a:pPr>
+            <a:r>
+              <a:rPr sz="1500">
+                <a:solidFill>
+                  <a:srgbClr val="22282E"/>
+                </a:solidFill>
+              </a:rPr>
+              <a:t>•  16 de 64 bits (RAX–R15); sus mitades de 32 bits son EAX, etc. Característica clave: operar</a:t>
+            </a:r>
+          </a:p>
+          <a:p>
+            <a:pPr>
+              <a:spcAft>
+                <a:spcPts val="600"/>
+              </a:spcAft>
+            </a:pPr>
+            <a:r>
+              <a:rPr sz="1500">
+                <a:solidFill>
+                  <a:srgbClr val="22282E"/>
+                </a:solidFill>
+              </a:rPr>
+              <a:t>•  sobre EAX pone a cero los 32 bits altos de RAX.</a:t>
+            </a:r>
+          </a:p>
+          <a:p>
+            <a:pPr>
+              <a:spcAft>
+                <a:spcPts val="600"/>
+              </a:spcAft>
+            </a:pPr>
+            <a:r>
+              <a:rPr sz="1500">
+                <a:solidFill>
+                  <a:srgbClr val="22282E"/>
+                </a:solidFill>
+              </a:rPr>
+              <a:t>•  RIP / EIP (instruction pointer): apunta a la siguiente instrucción a ejecutar. Clave: no se</a:t>
+            </a:r>
+          </a:p>
+          <a:p>
+            <a:pPr>
+              <a:spcAft>
+                <a:spcPts val="600"/>
+              </a:spcAft>
+            </a:pPr>
+            <a:r>
+              <a:rPr sz="1500">
+                <a:solidFill>
+                  <a:srgbClr val="22282E"/>
+                </a:solidFill>
+              </a:rPr>
+              <a:t>•  escribe directamente con mov; se altera con call, ret, jmp — de ahí su valor para el atacante.</a:t>
+            </a:r>
+          </a:p>
+          <a:p>
+            <a:pPr>
+              <a:spcAft>
+                <a:spcPts val="600"/>
+              </a:spcAft>
+            </a:pPr>
+            <a:r>
+              <a:rPr sz="1500">
+                <a:solidFill>
+                  <a:srgbClr val="22282E"/>
+                </a:solidFill>
+              </a:rPr>
+              <a:t>•  RFLAGS: registro de banderas (ZF, SF, CF, OF…) que refleja el resultado de operaciones y guía</a:t>
+            </a:r>
+          </a:p>
+          <a:p>
+            <a:pPr>
+              <a:spcAft>
+                <a:spcPts val="600"/>
+              </a:spcAft>
+            </a:pPr>
+            <a:r>
+              <a:rPr sz="1500">
+                <a:solidFill>
+                  <a:srgbClr val="22282E"/>
+                </a:solidFill>
+              </a:rPr>
+              <a:t>•  los saltos condicionales. Clave: cmp no guarda resultado, solo actualiza banderas.</a:t>
             </a:r>
           </a:p>
         </p:txBody>
@@ -4465,7 +4871,7 @@
                   <a:srgbClr val="0B3D2E"/>
                 </a:solidFill>
               </a:rPr>
-              <a:t>🧪 Laboratorio guiado</a:t>
+              <a:t>📔 Glosario</a:t>
             </a:r>
           </a:p>
         </p:txBody>
@@ -4503,97 +4909,97 @@
                   <a:srgbClr val="22282E"/>
                 </a:solidFill>
               </a:rPr>
-              <a:t>•  Crea suma.c:</a:t>
-            </a:r>
-          </a:p>
-          <a:p>
-            <a:pPr>
-              <a:spcAft>
-                <a:spcPts val="600"/>
-              </a:spcAft>
-            </a:pPr>
-            <a:r>
-              <a:rPr sz="1500">
-                <a:solidFill>
-                  <a:srgbClr val="22282E"/>
-                </a:solidFill>
-              </a:rPr>
-              <a:t>•  int suma(int a, int b) { return a + b; }</a:t>
-            </a:r>
-          </a:p>
-          <a:p>
-            <a:pPr>
-              <a:spcAft>
-                <a:spcPts val="600"/>
-              </a:spcAft>
-            </a:pPr>
-            <a:r>
-              <a:rPr sz="1500">
-                <a:solidFill>
-                  <a:srgbClr val="22282E"/>
-                </a:solidFill>
-              </a:rPr>
-              <a:t>•  int main(void) { return suma(3, 4); }</a:t>
-            </a:r>
-          </a:p>
-          <a:p>
-            <a:pPr>
-              <a:spcAft>
-                <a:spcPts val="600"/>
-              </a:spcAft>
-            </a:pPr>
-            <a:r>
-              <a:rPr sz="1500">
-                <a:solidFill>
-                  <a:srgbClr val="22282E"/>
-                </a:solidFill>
-              </a:rPr>
-              <a:t>•  Genera ensamblador legible con sintaxis Intel:</a:t>
-            </a:r>
-          </a:p>
-          <a:p>
-            <a:pPr>
-              <a:spcAft>
-                <a:spcPts val="600"/>
-              </a:spcAft>
-            </a:pPr>
-            <a:r>
-              <a:rPr sz="1500">
-                <a:solidFill>
-                  <a:srgbClr val="22282E"/>
-                </a:solidFill>
-              </a:rPr>
-              <a:t>•  gcc -O0 -S -masm=intel suma.c -o suma.s</a:t>
-            </a:r>
-          </a:p>
-          <a:p>
-            <a:pPr>
-              <a:spcAft>
-                <a:spcPts val="600"/>
-              </a:spcAft>
-            </a:pPr>
-            <a:r>
-              <a:rPr sz="1500">
-                <a:solidFill>
-                  <a:srgbClr val="22282E"/>
-                </a:solidFill>
-              </a:rPr>
-              <a:t>•  cat suma.s</a:t>
-            </a:r>
-          </a:p>
-          <a:p>
-            <a:pPr>
-              <a:spcAft>
-                <a:spcPts val="600"/>
-              </a:spcAft>
-            </a:pPr>
-            <a:r>
-              <a:rPr sz="1500">
-                <a:solidFill>
-                  <a:srgbClr val="22282E"/>
-                </a:solidFill>
-              </a:rPr>
-              <a:t>•  Localiza push rbp / mov rbp, rsp (prólogo) y pop rbp / ret (epílogo).</a:t>
+              <a:t>•  Término — Definición concisa</a:t>
+            </a:r>
+          </a:p>
+          <a:p>
+            <a:pPr>
+              <a:spcAft>
+                <a:spcPts val="600"/>
+              </a:spcAft>
+            </a:pPr>
+            <a:r>
+              <a:rPr sz="1500">
+                <a:solidFill>
+                  <a:srgbClr val="22282E"/>
+                </a:solidFill>
+              </a:rPr>
+              <a:t>•  Registro (GPR) — Celda de memoria ultrarrápida de la CPU (RAX…R15)</a:t>
+            </a:r>
+          </a:p>
+          <a:p>
+            <a:pPr>
+              <a:spcAft>
+                <a:spcPts val="600"/>
+              </a:spcAft>
+            </a:pPr>
+            <a:r>
+              <a:rPr sz="1500">
+                <a:solidFill>
+                  <a:srgbClr val="22282E"/>
+                </a:solidFill>
+              </a:rPr>
+              <a:t>•  RAX / EAX / AX / AL — El mismo registro en 64, 32, 16 y 8 bits</a:t>
+            </a:r>
+          </a:p>
+          <a:p>
+            <a:pPr>
+              <a:spcAft>
+                <a:spcPts val="600"/>
+              </a:spcAft>
+            </a:pPr>
+            <a:r>
+              <a:rPr sz="1500">
+                <a:solidFill>
+                  <a:srgbClr val="22282E"/>
+                </a:solidFill>
+              </a:rPr>
+              <a:t>•  RIP — Puntero de instrucción; controlarlo controla la ejecución</a:t>
+            </a:r>
+          </a:p>
+          <a:p>
+            <a:pPr>
+              <a:spcAft>
+                <a:spcPts val="600"/>
+              </a:spcAft>
+            </a:pPr>
+            <a:r>
+              <a:rPr sz="1500">
+                <a:solidFill>
+                  <a:srgbClr val="22282E"/>
+                </a:solidFill>
+              </a:rPr>
+              <a:t>•  RSP — Puntero a la cima de la pila</a:t>
+            </a:r>
+          </a:p>
+          <a:p>
+            <a:pPr>
+              <a:spcAft>
+                <a:spcPts val="600"/>
+              </a:spcAft>
+            </a:pPr>
+            <a:r>
+              <a:rPr sz="1500">
+                <a:solidFill>
+                  <a:srgbClr val="22282E"/>
+                </a:solidFill>
+              </a:rPr>
+              <a:t>•  RFLAGS — Indicadores (cero, acarreo, signo) que rigen los saltos</a:t>
+            </a:r>
+          </a:p>
+          <a:p>
+            <a:pPr>
+              <a:spcAft>
+                <a:spcPts val="600"/>
+              </a:spcAft>
+            </a:pPr>
+            <a:r>
+              <a:rPr sz="1500">
+                <a:solidFill>
+                  <a:srgbClr val="22282E"/>
+                </a:solidFill>
+              </a:rPr>
+              <a:t>•  Modo real / protegido / largo — 16, 32 y 64 bits; modo largo es el actual</a:t>
             </a:r>
           </a:p>
         </p:txBody>
@@ -4644,7 +5050,7 @@
                   <a:srgbClr val="0B3D2E"/>
                 </a:solidFill>
               </a:rPr>
-              <a:t>✍️ Ejercicios</a:t>
+              <a:t>🧰 Herramientas y preparación</a:t>
             </a:r>
           </a:p>
         </p:txBody>
@@ -4682,82 +5088,22 @@
                   <a:srgbClr val="22282E"/>
                 </a:solidFill>
               </a:rPr>
-              <a:t>•  Convierte a sintaxis AT&amp;T: mov eax, 5, add rbx, rax, lea rax, [rbp-0x4].</a:t>
-            </a:r>
-          </a:p>
-          <a:p>
-            <a:pPr>
-              <a:spcAft>
-                <a:spcPts val="600"/>
-              </a:spcAft>
-            </a:pPr>
-            <a:r>
-              <a:rPr sz="1500">
-                <a:solidFill>
-                  <a:srgbClr val="22282E"/>
-                </a:solidFill>
-              </a:rPr>
-              <a:t>•  Escribe en little-endian los bytes de la dirección 0x00401136.</a:t>
-            </a:r>
-          </a:p>
-          <a:p>
-            <a:pPr>
-              <a:spcAft>
-                <a:spcPts val="600"/>
-              </a:spcAft>
-            </a:pPr>
-            <a:r>
-              <a:rPr sz="1500">
-                <a:solidFill>
-                  <a:srgbClr val="22282E"/>
-                </a:solidFill>
-              </a:rPr>
-              <a:t>•  Modifica hola.asm para que devuelva la suma de dos inmediatos usando add.</a:t>
-            </a:r>
-          </a:p>
-          <a:p>
-            <a:pPr>
-              <a:spcAft>
-                <a:spcPts val="600"/>
-              </a:spcAft>
-            </a:pPr>
-            <a:r>
-              <a:rPr sz="1500">
-                <a:solidFill>
-                  <a:srgbClr val="22282E"/>
-                </a:solidFill>
-              </a:rPr>
-              <a:t>•  Compila suma.c con -O2 y explica por qué el desensamblado es más corto.</a:t>
-            </a:r>
-          </a:p>
-          <a:p>
-            <a:pPr>
-              <a:spcAft>
-                <a:spcPts val="600"/>
-              </a:spcAft>
-            </a:pPr>
-            <a:r>
-              <a:rPr sz="1500">
-                <a:solidFill>
-                  <a:srgbClr val="22282E"/>
-                </a:solidFill>
-              </a:rPr>
-              <a:t>•  Identifica en un objdump cualquiera tres instrucciones de salto y di qué bandera consultan.</a:t>
-            </a:r>
-          </a:p>
-          <a:p>
-            <a:pPr>
-              <a:spcAft>
-                <a:spcPts val="600"/>
-              </a:spcAft>
-            </a:pPr>
-            <a:r>
-              <a:rPr sz="1500">
-                <a:solidFill>
-                  <a:srgbClr val="22282E"/>
-                </a:solidFill>
-              </a:rPr>
-              <a:t>•  Escribe una función C con un if y localiza el cmp + jne correspondiente en el ASM.</a:t>
+              <a:t>•  Trabaja en una VM Linux aislada (por ejemplo Ubuntu/Kali x86-64) que usarás durante toda la parte.</a:t>
+            </a:r>
+          </a:p>
+          <a:p>
+            <a:pPr>
+              <a:spcAft>
+                <a:spcPts val="600"/>
+              </a:spcAft>
+            </a:pPr>
+            <a:r>
+              <a:rPr sz="1500">
+                <a:solidFill>
+                  <a:srgbClr val="22282E"/>
+                </a:solidFill>
+              </a:rPr>
+              <a:t>•  Para ver desensamblado con sintaxis Intel de forma cómoda añade a ~/.gdbinit: set disassembly-flavor intel.</a:t>
             </a:r>
           </a:p>
         </p:txBody>
@@ -4808,7 +5154,7 @@
                   <a:srgbClr val="0B3D2E"/>
                 </a:solidFill>
               </a:rPr>
-              <a:t>📝 Reto verificable</a:t>
+              <a:t>🧪 Laboratorio guiado</a:t>
             </a:r>
           </a:p>
         </p:txBody>
@@ -4846,52 +5192,97 @@
                   <a:srgbClr val="22282E"/>
                 </a:solidFill>
               </a:rPr>
-              <a:t>•  Escribe en NASM un programa que calcule (7  6) - 5 usando solo registros e instrucciones</a:t>
-            </a:r>
-          </a:p>
-          <a:p>
-            <a:pPr>
-              <a:spcAft>
-                <a:spcPts val="600"/>
-              </a:spcAft>
-            </a:pPr>
-            <a:r>
-              <a:rPr sz="1500">
-                <a:solidFill>
-                  <a:srgbClr val="22282E"/>
-                </a:solidFill>
-              </a:rPr>
-              <a:t>•  aritméticas y devuelva el resultado como código de salida.</a:t>
-            </a:r>
-          </a:p>
-          <a:p>
-            <a:pPr>
-              <a:spcAft>
-                <a:spcPts val="600"/>
-              </a:spcAft>
-            </a:pPr>
-            <a:r>
-              <a:rPr sz="1500">
-                <a:solidFill>
-                  <a:srgbClr val="22282E"/>
-                </a:solidFill>
-              </a:rPr>
-              <a:t>•  Criterio de aceptación: ./programa; echo $? imprime 37, y objdump -d muestra al menos</a:t>
-            </a:r>
-          </a:p>
-          <a:p>
-            <a:pPr>
-              <a:spcAft>
-                <a:spcPts val="600"/>
-              </a:spcAft>
-            </a:pPr>
-            <a:r>
-              <a:rPr sz="1500">
-                <a:solidFill>
-                  <a:srgbClr val="22282E"/>
-                </a:solidFill>
-              </a:rPr>
-              <a:t>•  una instrucción imul/mul y una sub.</a:t>
+              <a:t>•  Crea suma.c:</a:t>
+            </a:r>
+          </a:p>
+          <a:p>
+            <a:pPr>
+              <a:spcAft>
+                <a:spcPts val="600"/>
+              </a:spcAft>
+            </a:pPr>
+            <a:r>
+              <a:rPr sz="1500">
+                <a:solidFill>
+                  <a:srgbClr val="22282E"/>
+                </a:solidFill>
+              </a:rPr>
+              <a:t>•  Genera ensamblador legible con sintaxis Intel:</a:t>
+            </a:r>
+          </a:p>
+          <a:p>
+            <a:pPr>
+              <a:spcAft>
+                <a:spcPts val="600"/>
+              </a:spcAft>
+            </a:pPr>
+            <a:r>
+              <a:rPr sz="1500">
+                <a:solidFill>
+                  <a:srgbClr val="22282E"/>
+                </a:solidFill>
+              </a:rPr>
+              <a:t>•  Localiza push rbp / mov rbp, rsp (prólogo) y pop rbp / ret (epílogo).</a:t>
+            </a:r>
+          </a:p>
+          <a:p>
+            <a:pPr>
+              <a:spcAft>
+                <a:spcPts val="600"/>
+              </a:spcAft>
+            </a:pPr>
+            <a:r>
+              <a:rPr sz="1500">
+                <a:solidFill>
+                  <a:srgbClr val="22282E"/>
+                </a:solidFill>
+              </a:rPr>
+              <a:t>•  Compila y desensambla el binario:</a:t>
+            </a:r>
+          </a:p>
+          <a:p>
+            <a:pPr>
+              <a:spcAft>
+                <a:spcPts val="600"/>
+              </a:spcAft>
+            </a:pPr>
+            <a:r>
+              <a:rPr sz="1500">
+                <a:solidFill>
+                  <a:srgbClr val="22282E"/>
+                </a:solidFill>
+              </a:rPr>
+              <a:t>•  Observa cómo se pasan los argumentos: en x64 el primero va en EDI y el segundo en ESI</a:t>
+            </a:r>
+          </a:p>
+          <a:p>
+            <a:pPr>
+              <a:spcAft>
+                <a:spcPts val="600"/>
+              </a:spcAft>
+            </a:pPr>
+            <a:r>
+              <a:rPr sz="1500">
+                <a:solidFill>
+                  <a:srgbClr val="22282E"/>
+                </a:solidFill>
+              </a:rPr>
+              <a:t>•  (System V ABI). Anota qué instrucción hace la suma (add).</a:t>
+            </a:r>
+          </a:p>
+          <a:p>
+            <a:pPr>
+              <a:spcAft>
+                <a:spcPts val="600"/>
+              </a:spcAft>
+            </a:pPr>
+            <a:r>
+              <a:rPr sz="1500">
+                <a:solidFill>
+                  <a:srgbClr val="22282E"/>
+                </a:solidFill>
+              </a:rPr>
+              <a:t>•  Escribe tu primer ASM puro con NASM (hola.asm) que solo termine con exit(42):</a:t>
             </a:r>
           </a:p>
         </p:txBody>
